--- a/curso_es/pptx/S26.pptx
+++ b/curso_es/pptx/S26.pptx
@@ -4417,7 +4417,7 @@
                 </a:solidFill>
                 <a:latin typeface="Nunito Sans"/>
               </a:rPr>
-              <a:t>El pediatra de Omar le recomienda una vacuna. Lo mismo dicen Sanidad y casi todos los médicos.</a:t>
+              <a:t>El pediatra de un chico le recomienda una vacuna. Lo mismo dicen Sanidad y casi todos los médicos.</a:t>
             </a:r>
           </a:p>
         </p:txBody>
